--- a/examples/ppt/transitions/transitions-modern.pptx
+++ b/examples/ppt/transitions/transitions-modern.pptx
@@ -5,25 +5,25 @@
     <p:sldMasterId xmlns:r="http://schemas.openxmlformats.org/officeDocument/2006/relationships" id="2147483648" r:id="rId1"/>
   </p:sldMasterIdLst>
   <p:sldIdLst>
-    <p:sldId id="256" r:id="Rcbeb1345e6ae45b3"/>
-    <p:sldId id="257" r:id="R310de5851eca4bae"/>
-    <p:sldId id="258" r:id="R236d45f7ea204409"/>
-    <p:sldId id="259" r:id="R8fa2709c2a434c8e"/>
-    <p:sldId id="260" r:id="R143dc4d28f224b69"/>
-    <p:sldId id="261" r:id="R290bdafbb0e24011"/>
-    <p:sldId id="262" r:id="R400683665f6d4226"/>
-    <p:sldId id="263" r:id="Rf213812df94b48b4"/>
-    <p:sldId id="264" r:id="R3af0d2309b584614"/>
-    <p:sldId id="265" r:id="Rabb0f315657d494f"/>
-    <p:sldId id="266" r:id="Rdd21b994108b4b4a"/>
-    <p:sldId id="267" r:id="R5dabe8ddb7b843de"/>
-    <p:sldId id="268" r:id="R78d0dabef640475b"/>
-    <p:sldId id="269" r:id="Rdb8ae4b9289e48ce"/>
-    <p:sldId id="270" r:id="Rf3074503b1354e10"/>
-    <p:sldId id="271" r:id="Ree85f68fd6df45bc"/>
-    <p:sldId id="272" r:id="R26228eb7af5a4ed5"/>
-    <p:sldId id="273" r:id="R6beee7ff2c10483a"/>
-    <p:sldId id="274" r:id="R0c31b885a14f42ca"/>
+    <p:sldId id="256" r:id="Rc52ce724baaf4e2c"/>
+    <p:sldId id="257" r:id="Rb2da448d9df24cb1"/>
+    <p:sldId id="258" r:id="R08f9639f51944548"/>
+    <p:sldId id="259" r:id="R29b34175f82f43f4"/>
+    <p:sldId id="260" r:id="R49f39dc067ff4935"/>
+    <p:sldId id="261" r:id="R6a3d1ee4389849e3"/>
+    <p:sldId id="262" r:id="R56acdbbf67fb4369"/>
+    <p:sldId id="263" r:id="R41823015b6b74bf9"/>
+    <p:sldId id="264" r:id="Rb04838fd32c74251"/>
+    <p:sldId id="265" r:id="R41ec03cef7a944a4"/>
+    <p:sldId id="266" r:id="R3d1babfbc072496e"/>
+    <p:sldId id="267" r:id="Rb190040076924de0"/>
+    <p:sldId id="268" r:id="R7cad0b03a8024476"/>
+    <p:sldId id="269" r:id="Rcf70fcd694b242ee"/>
+    <p:sldId id="270" r:id="Rceea2849c3b242f9"/>
+    <p:sldId id="271" r:id="R0e7b50555f48410b"/>
+    <p:sldId id="272" r:id="R4798896c254c4417"/>
+    <p:sldId id="273" r:id="R1f6c36a254c34dbd"/>
+    <p:sldId id="274" r:id="R0947f6a47a214979"/>
   </p:sldIdLst>
   <p:sldSz cx="12192000" cy="6858000"/>
   <p:notesSz cx="6858000" cy="9144000"/>
@@ -298,7 +298,7 @@
 </file>
 
 <file path=ppt/slideMasters/slideMaster1.xml><?xml version="1.0" encoding="utf-8"?>
-<p:sldMaster xmlns:p="http://schemas.openxmlformats.org/presentationml/2006/main">
+<p:sldMaster xmlns:r="http://schemas.openxmlformats.org/officeDocument/2006/relationships" xmlns:p="http://schemas.openxmlformats.org/presentationml/2006/main">
   <p:cSld>
     <p:spTree>
       <p:nvGrpSpPr>
@@ -332,7 +332,7 @@
       <p:grpSpPr/>
       <p:sp>
         <p:nvSpPr>
-          <p:cNvPr id="10000" name="TextBox 1"/>
+          <p:cNvPr id="100000" name="TextBox 1"/>
           <p:cNvSpPr/>
           <p:nvPr/>
         </p:nvSpPr>
@@ -351,17 +351,12 @@
         <p:txBody>
           <a:bodyPr xmlns:a="http://schemas.openxmlformats.org/drawingml/2006/main"/>
           <a:lstStyle xmlns:a="http://schemas.openxmlformats.org/drawingml/2006/main"/>
-          <a:p xmlns:a="http://schemas.openxmlformats.org/drawingml/2006/main">
-            <a:r>
-              <a:rPr lang="en-US"/>
-              <a:t/>
-            </a:r>
-          </a:p>
-        </p:txBody>
-      </p:sp>
-      <p:sp>
-        <p:nvSpPr>
-          <p:cNvPr id="10001" name="TextBox 2"/>
+          <a:p xmlns:a="http://schemas.openxmlformats.org/drawingml/2006/main"/>
+        </p:txBody>
+      </p:sp>
+      <p:sp>
+        <p:nvSpPr>
+          <p:cNvPr id="100001" name="TextBox 2"/>
           <p:cNvSpPr txBox="1"/>
           <p:nvPr/>
         </p:nvSpPr>
@@ -407,7 +402,7 @@
       <p:grpSpPr/>
       <p:sp>
         <p:nvSpPr>
-          <p:cNvPr id="10018" name="TextBox 1"/>
+          <p:cNvPr id="100018" name="TextBox 1"/>
           <p:cNvSpPr/>
           <p:nvPr/>
         </p:nvSpPr>
@@ -426,17 +421,12 @@
         <p:txBody>
           <a:bodyPr xmlns:a="http://schemas.openxmlformats.org/drawingml/2006/main"/>
           <a:lstStyle xmlns:a="http://schemas.openxmlformats.org/drawingml/2006/main"/>
-          <a:p xmlns:a="http://schemas.openxmlformats.org/drawingml/2006/main">
-            <a:r>
-              <a:rPr lang="en-US"/>
-              <a:t/>
-            </a:r>
-          </a:p>
-        </p:txBody>
-      </p:sp>
-      <p:sp>
-        <p:nvSpPr>
-          <p:cNvPr id="10019" name="TextBox 2"/>
+          <a:p xmlns:a="http://schemas.openxmlformats.org/drawingml/2006/main"/>
+        </p:txBody>
+      </p:sp>
+      <p:sp>
+        <p:nvSpPr>
+          <p:cNvPr id="100019" name="TextBox 2"/>
           <p:cNvSpPr txBox="1"/>
           <p:nvPr/>
         </p:nvSpPr>
@@ -494,7 +484,7 @@
       <p:grpSpPr/>
       <p:sp>
         <p:nvSpPr>
-          <p:cNvPr id="10020" name="TextBox 1"/>
+          <p:cNvPr id="100020" name="TextBox 1"/>
           <p:cNvSpPr/>
           <p:nvPr/>
         </p:nvSpPr>
@@ -513,17 +503,12 @@
         <p:txBody>
           <a:bodyPr xmlns:a="http://schemas.openxmlformats.org/drawingml/2006/main"/>
           <a:lstStyle xmlns:a="http://schemas.openxmlformats.org/drawingml/2006/main"/>
-          <a:p xmlns:a="http://schemas.openxmlformats.org/drawingml/2006/main">
-            <a:r>
-              <a:rPr lang="en-US"/>
-              <a:t/>
-            </a:r>
-          </a:p>
-        </p:txBody>
-      </p:sp>
-      <p:sp>
-        <p:nvSpPr>
-          <p:cNvPr id="10021" name="TextBox 2"/>
+          <a:p xmlns:a="http://schemas.openxmlformats.org/drawingml/2006/main"/>
+        </p:txBody>
+      </p:sp>
+      <p:sp>
+        <p:nvSpPr>
+          <p:cNvPr id="100021" name="TextBox 2"/>
           <p:cNvSpPr txBox="1"/>
           <p:nvPr/>
         </p:nvSpPr>
@@ -581,7 +566,7 @@
       <p:grpSpPr/>
       <p:sp>
         <p:nvSpPr>
-          <p:cNvPr id="10022" name="TextBox 1"/>
+          <p:cNvPr id="100022" name="TextBox 1"/>
           <p:cNvSpPr/>
           <p:nvPr/>
         </p:nvSpPr>
@@ -600,17 +585,12 @@
         <p:txBody>
           <a:bodyPr xmlns:a="http://schemas.openxmlformats.org/drawingml/2006/main"/>
           <a:lstStyle xmlns:a="http://schemas.openxmlformats.org/drawingml/2006/main"/>
-          <a:p xmlns:a="http://schemas.openxmlformats.org/drawingml/2006/main">
-            <a:r>
-              <a:rPr lang="en-US"/>
-              <a:t/>
-            </a:r>
-          </a:p>
-        </p:txBody>
-      </p:sp>
-      <p:sp>
-        <p:nvSpPr>
-          <p:cNvPr id="10023" name="TextBox 2"/>
+          <a:p xmlns:a="http://schemas.openxmlformats.org/drawingml/2006/main"/>
+        </p:txBody>
+      </p:sp>
+      <p:sp>
+        <p:nvSpPr>
+          <p:cNvPr id="100023" name="TextBox 2"/>
           <p:cNvSpPr txBox="1"/>
           <p:nvPr/>
         </p:nvSpPr>
@@ -668,7 +648,7 @@
       <p:grpSpPr/>
       <p:sp>
         <p:nvSpPr>
-          <p:cNvPr id="10024" name="TextBox 1"/>
+          <p:cNvPr id="100024" name="TextBox 1"/>
           <p:cNvSpPr/>
           <p:nvPr/>
         </p:nvSpPr>
@@ -687,17 +667,12 @@
         <p:txBody>
           <a:bodyPr xmlns:a="http://schemas.openxmlformats.org/drawingml/2006/main"/>
           <a:lstStyle xmlns:a="http://schemas.openxmlformats.org/drawingml/2006/main"/>
-          <a:p xmlns:a="http://schemas.openxmlformats.org/drawingml/2006/main">
-            <a:r>
-              <a:rPr lang="en-US"/>
-              <a:t/>
-            </a:r>
-          </a:p>
-        </p:txBody>
-      </p:sp>
-      <p:sp>
-        <p:nvSpPr>
-          <p:cNvPr id="10025" name="TextBox 2"/>
+          <a:p xmlns:a="http://schemas.openxmlformats.org/drawingml/2006/main"/>
+        </p:txBody>
+      </p:sp>
+      <p:sp>
+        <p:nvSpPr>
+          <p:cNvPr id="100025" name="TextBox 2"/>
           <p:cNvSpPr txBox="1"/>
           <p:nvPr/>
         </p:nvSpPr>
@@ -755,7 +730,7 @@
       <p:grpSpPr/>
       <p:sp>
         <p:nvSpPr>
-          <p:cNvPr id="10026" name="TextBox 1"/>
+          <p:cNvPr id="100026" name="TextBox 1"/>
           <p:cNvSpPr/>
           <p:nvPr/>
         </p:nvSpPr>
@@ -774,17 +749,12 @@
         <p:txBody>
           <a:bodyPr xmlns:a="http://schemas.openxmlformats.org/drawingml/2006/main"/>
           <a:lstStyle xmlns:a="http://schemas.openxmlformats.org/drawingml/2006/main"/>
-          <a:p xmlns:a="http://schemas.openxmlformats.org/drawingml/2006/main">
-            <a:r>
-              <a:rPr lang="en-US"/>
-              <a:t/>
-            </a:r>
-          </a:p>
-        </p:txBody>
-      </p:sp>
-      <p:sp>
-        <p:nvSpPr>
-          <p:cNvPr id="10027" name="TextBox 2"/>
+          <a:p xmlns:a="http://schemas.openxmlformats.org/drawingml/2006/main"/>
+        </p:txBody>
+      </p:sp>
+      <p:sp>
+        <p:nvSpPr>
+          <p:cNvPr id="100027" name="TextBox 2"/>
           <p:cNvSpPr txBox="1"/>
           <p:nvPr/>
         </p:nvSpPr>
@@ -842,7 +812,7 @@
       <p:grpSpPr/>
       <p:sp>
         <p:nvSpPr>
-          <p:cNvPr id="10028" name="TextBox 1"/>
+          <p:cNvPr id="100028" name="TextBox 1"/>
           <p:cNvSpPr/>
           <p:nvPr/>
         </p:nvSpPr>
@@ -861,17 +831,12 @@
         <p:txBody>
           <a:bodyPr xmlns:a="http://schemas.openxmlformats.org/drawingml/2006/main"/>
           <a:lstStyle xmlns:a="http://schemas.openxmlformats.org/drawingml/2006/main"/>
-          <a:p xmlns:a="http://schemas.openxmlformats.org/drawingml/2006/main">
-            <a:r>
-              <a:rPr lang="en-US"/>
-              <a:t/>
-            </a:r>
-          </a:p>
-        </p:txBody>
-      </p:sp>
-      <p:sp>
-        <p:nvSpPr>
-          <p:cNvPr id="10029" name="TextBox 2"/>
+          <a:p xmlns:a="http://schemas.openxmlformats.org/drawingml/2006/main"/>
+        </p:txBody>
+      </p:sp>
+      <p:sp>
+        <p:nvSpPr>
+          <p:cNvPr id="100029" name="TextBox 2"/>
           <p:cNvSpPr txBox="1"/>
           <p:nvPr/>
         </p:nvSpPr>
@@ -929,7 +894,7 @@
       <p:grpSpPr/>
       <p:sp>
         <p:nvSpPr>
-          <p:cNvPr id="10030" name="TextBox 1"/>
+          <p:cNvPr id="100030" name="TextBox 1"/>
           <p:cNvSpPr/>
           <p:nvPr/>
         </p:nvSpPr>
@@ -948,17 +913,12 @@
         <p:txBody>
           <a:bodyPr xmlns:a="http://schemas.openxmlformats.org/drawingml/2006/main"/>
           <a:lstStyle xmlns:a="http://schemas.openxmlformats.org/drawingml/2006/main"/>
-          <a:p xmlns:a="http://schemas.openxmlformats.org/drawingml/2006/main">
-            <a:r>
-              <a:rPr lang="en-US"/>
-              <a:t/>
-            </a:r>
-          </a:p>
-        </p:txBody>
-      </p:sp>
-      <p:sp>
-        <p:nvSpPr>
-          <p:cNvPr id="10031" name="TextBox 2"/>
+          <a:p xmlns:a="http://schemas.openxmlformats.org/drawingml/2006/main"/>
+        </p:txBody>
+      </p:sp>
+      <p:sp>
+        <p:nvSpPr>
+          <p:cNvPr id="100031" name="TextBox 2"/>
           <p:cNvSpPr txBox="1"/>
           <p:nvPr/>
         </p:nvSpPr>
@@ -1016,7 +976,7 @@
       <p:grpSpPr/>
       <p:sp>
         <p:nvSpPr>
-          <p:cNvPr id="10032" name="TextBox 1"/>
+          <p:cNvPr id="100032" name="TextBox 1"/>
           <p:cNvSpPr/>
           <p:nvPr/>
         </p:nvSpPr>
@@ -1035,17 +995,12 @@
         <p:txBody>
           <a:bodyPr xmlns:a="http://schemas.openxmlformats.org/drawingml/2006/main"/>
           <a:lstStyle xmlns:a="http://schemas.openxmlformats.org/drawingml/2006/main"/>
-          <a:p xmlns:a="http://schemas.openxmlformats.org/drawingml/2006/main">
-            <a:r>
-              <a:rPr lang="en-US"/>
-              <a:t/>
-            </a:r>
-          </a:p>
-        </p:txBody>
-      </p:sp>
-      <p:sp>
-        <p:nvSpPr>
-          <p:cNvPr id="10033" name="TextBox 2"/>
+          <a:p xmlns:a="http://schemas.openxmlformats.org/drawingml/2006/main"/>
+        </p:txBody>
+      </p:sp>
+      <p:sp>
+        <p:nvSpPr>
+          <p:cNvPr id="100033" name="TextBox 2"/>
           <p:cNvSpPr txBox="1"/>
           <p:nvPr/>
         </p:nvSpPr>
@@ -1103,7 +1058,7 @@
       <p:grpSpPr/>
       <p:sp>
         <p:nvSpPr>
-          <p:cNvPr id="10034" name="TextBox 1"/>
+          <p:cNvPr id="100034" name="TextBox 1"/>
           <p:cNvSpPr/>
           <p:nvPr/>
         </p:nvSpPr>
@@ -1122,17 +1077,12 @@
         <p:txBody>
           <a:bodyPr xmlns:a="http://schemas.openxmlformats.org/drawingml/2006/main"/>
           <a:lstStyle xmlns:a="http://schemas.openxmlformats.org/drawingml/2006/main"/>
-          <a:p xmlns:a="http://schemas.openxmlformats.org/drawingml/2006/main">
-            <a:r>
-              <a:rPr lang="en-US"/>
-              <a:t/>
-            </a:r>
-          </a:p>
-        </p:txBody>
-      </p:sp>
-      <p:sp>
-        <p:nvSpPr>
-          <p:cNvPr id="10035" name="TextBox 2"/>
+          <a:p xmlns:a="http://schemas.openxmlformats.org/drawingml/2006/main"/>
+        </p:txBody>
+      </p:sp>
+      <p:sp>
+        <p:nvSpPr>
+          <p:cNvPr id="100035" name="TextBox 2"/>
           <p:cNvSpPr txBox="1"/>
           <p:nvPr/>
         </p:nvSpPr>
@@ -1190,7 +1140,7 @@
       <p:grpSpPr/>
       <p:sp>
         <p:nvSpPr>
-          <p:cNvPr id="10036" name="TextBox 1"/>
+          <p:cNvPr id="100036" name="TextBox 1"/>
           <p:cNvSpPr/>
           <p:nvPr/>
         </p:nvSpPr>
@@ -1209,17 +1159,12 @@
         <p:txBody>
           <a:bodyPr xmlns:a="http://schemas.openxmlformats.org/drawingml/2006/main"/>
           <a:lstStyle xmlns:a="http://schemas.openxmlformats.org/drawingml/2006/main"/>
-          <a:p xmlns:a="http://schemas.openxmlformats.org/drawingml/2006/main">
-            <a:r>
-              <a:rPr lang="en-US"/>
-              <a:t/>
-            </a:r>
-          </a:p>
-        </p:txBody>
-      </p:sp>
-      <p:sp>
-        <p:nvSpPr>
-          <p:cNvPr id="10037" name="TextBox 2"/>
+          <a:p xmlns:a="http://schemas.openxmlformats.org/drawingml/2006/main"/>
+        </p:txBody>
+      </p:sp>
+      <p:sp>
+        <p:nvSpPr>
+          <p:cNvPr id="100037" name="TextBox 2"/>
           <p:cNvSpPr txBox="1"/>
           <p:nvPr/>
         </p:nvSpPr>
@@ -1277,7 +1222,7 @@
       <p:grpSpPr/>
       <p:sp>
         <p:nvSpPr>
-          <p:cNvPr id="10002" name="TextBox 1"/>
+          <p:cNvPr id="100002" name="TextBox 1"/>
           <p:cNvSpPr/>
           <p:nvPr/>
         </p:nvSpPr>
@@ -1296,17 +1241,12 @@
         <p:txBody>
           <a:bodyPr xmlns:a="http://schemas.openxmlformats.org/drawingml/2006/main"/>
           <a:lstStyle xmlns:a="http://schemas.openxmlformats.org/drawingml/2006/main"/>
-          <a:p xmlns:a="http://schemas.openxmlformats.org/drawingml/2006/main">
-            <a:r>
-              <a:rPr lang="en-US"/>
-              <a:t/>
-            </a:r>
-          </a:p>
-        </p:txBody>
-      </p:sp>
-      <p:sp>
-        <p:nvSpPr>
-          <p:cNvPr id="10003" name="TextBox 2"/>
+          <a:p xmlns:a="http://schemas.openxmlformats.org/drawingml/2006/main"/>
+        </p:txBody>
+      </p:sp>
+      <p:sp>
+        <p:nvSpPr>
+          <p:cNvPr id="100003" name="TextBox 2"/>
           <p:cNvSpPr txBox="1"/>
           <p:nvPr/>
         </p:nvSpPr>
@@ -1364,7 +1304,7 @@
       <p:grpSpPr/>
       <p:sp>
         <p:nvSpPr>
-          <p:cNvPr id="10004" name="TextBox 1"/>
+          <p:cNvPr id="100004" name="TextBox 1"/>
           <p:cNvSpPr/>
           <p:nvPr/>
         </p:nvSpPr>
@@ -1383,17 +1323,12 @@
         <p:txBody>
           <a:bodyPr xmlns:a="http://schemas.openxmlformats.org/drawingml/2006/main"/>
           <a:lstStyle xmlns:a="http://schemas.openxmlformats.org/drawingml/2006/main"/>
-          <a:p xmlns:a="http://schemas.openxmlformats.org/drawingml/2006/main">
-            <a:r>
-              <a:rPr lang="en-US"/>
-              <a:t/>
-            </a:r>
-          </a:p>
-        </p:txBody>
-      </p:sp>
-      <p:sp>
-        <p:nvSpPr>
-          <p:cNvPr id="10005" name="TextBox 2"/>
+          <a:p xmlns:a="http://schemas.openxmlformats.org/drawingml/2006/main"/>
+        </p:txBody>
+      </p:sp>
+      <p:sp>
+        <p:nvSpPr>
+          <p:cNvPr id="100005" name="TextBox 2"/>
           <p:cNvSpPr txBox="1"/>
           <p:nvPr/>
         </p:nvSpPr>
@@ -1451,7 +1386,7 @@
       <p:grpSpPr/>
       <p:sp>
         <p:nvSpPr>
-          <p:cNvPr id="10006" name="TextBox 1"/>
+          <p:cNvPr id="100006" name="TextBox 1"/>
           <p:cNvSpPr/>
           <p:nvPr/>
         </p:nvSpPr>
@@ -1470,17 +1405,12 @@
         <p:txBody>
           <a:bodyPr xmlns:a="http://schemas.openxmlformats.org/drawingml/2006/main"/>
           <a:lstStyle xmlns:a="http://schemas.openxmlformats.org/drawingml/2006/main"/>
-          <a:p xmlns:a="http://schemas.openxmlformats.org/drawingml/2006/main">
-            <a:r>
-              <a:rPr lang="en-US"/>
-              <a:t/>
-            </a:r>
-          </a:p>
-        </p:txBody>
-      </p:sp>
-      <p:sp>
-        <p:nvSpPr>
-          <p:cNvPr id="10007" name="TextBox 2"/>
+          <a:p xmlns:a="http://schemas.openxmlformats.org/drawingml/2006/main"/>
+        </p:txBody>
+      </p:sp>
+      <p:sp>
+        <p:nvSpPr>
+          <p:cNvPr id="100007" name="TextBox 2"/>
           <p:cNvSpPr txBox="1"/>
           <p:nvPr/>
         </p:nvSpPr>
@@ -1538,7 +1468,7 @@
       <p:grpSpPr/>
       <p:sp>
         <p:nvSpPr>
-          <p:cNvPr id="10008" name="TextBox 1"/>
+          <p:cNvPr id="100008" name="TextBox 1"/>
           <p:cNvSpPr/>
           <p:nvPr/>
         </p:nvSpPr>
@@ -1557,17 +1487,12 @@
         <p:txBody>
           <a:bodyPr xmlns:a="http://schemas.openxmlformats.org/drawingml/2006/main"/>
           <a:lstStyle xmlns:a="http://schemas.openxmlformats.org/drawingml/2006/main"/>
-          <a:p xmlns:a="http://schemas.openxmlformats.org/drawingml/2006/main">
-            <a:r>
-              <a:rPr lang="en-US"/>
-              <a:t/>
-            </a:r>
-          </a:p>
-        </p:txBody>
-      </p:sp>
-      <p:sp>
-        <p:nvSpPr>
-          <p:cNvPr id="10009" name="TextBox 2"/>
+          <a:p xmlns:a="http://schemas.openxmlformats.org/drawingml/2006/main"/>
+        </p:txBody>
+      </p:sp>
+      <p:sp>
+        <p:nvSpPr>
+          <p:cNvPr id="100009" name="TextBox 2"/>
           <p:cNvSpPr txBox="1"/>
           <p:nvPr/>
         </p:nvSpPr>
@@ -1625,7 +1550,7 @@
       <p:grpSpPr/>
       <p:sp>
         <p:nvSpPr>
-          <p:cNvPr id="10010" name="TextBox 1"/>
+          <p:cNvPr id="100010" name="TextBox 1"/>
           <p:cNvSpPr/>
           <p:nvPr/>
         </p:nvSpPr>
@@ -1644,17 +1569,12 @@
         <p:txBody>
           <a:bodyPr xmlns:a="http://schemas.openxmlformats.org/drawingml/2006/main"/>
           <a:lstStyle xmlns:a="http://schemas.openxmlformats.org/drawingml/2006/main"/>
-          <a:p xmlns:a="http://schemas.openxmlformats.org/drawingml/2006/main">
-            <a:r>
-              <a:rPr lang="en-US"/>
-              <a:t/>
-            </a:r>
-          </a:p>
-        </p:txBody>
-      </p:sp>
-      <p:sp>
-        <p:nvSpPr>
-          <p:cNvPr id="10011" name="TextBox 2"/>
+          <a:p xmlns:a="http://schemas.openxmlformats.org/drawingml/2006/main"/>
+        </p:txBody>
+      </p:sp>
+      <p:sp>
+        <p:nvSpPr>
+          <p:cNvPr id="100011" name="TextBox 2"/>
           <p:cNvSpPr txBox="1"/>
           <p:nvPr/>
         </p:nvSpPr>
@@ -1712,7 +1632,7 @@
       <p:grpSpPr/>
       <p:sp>
         <p:nvSpPr>
-          <p:cNvPr id="10012" name="TextBox 1"/>
+          <p:cNvPr id="100012" name="TextBox 1"/>
           <p:cNvSpPr/>
           <p:nvPr/>
         </p:nvSpPr>
@@ -1731,17 +1651,12 @@
         <p:txBody>
           <a:bodyPr xmlns:a="http://schemas.openxmlformats.org/drawingml/2006/main"/>
           <a:lstStyle xmlns:a="http://schemas.openxmlformats.org/drawingml/2006/main"/>
-          <a:p xmlns:a="http://schemas.openxmlformats.org/drawingml/2006/main">
-            <a:r>
-              <a:rPr lang="en-US"/>
-              <a:t/>
-            </a:r>
-          </a:p>
-        </p:txBody>
-      </p:sp>
-      <p:sp>
-        <p:nvSpPr>
-          <p:cNvPr id="10013" name="TextBox 2"/>
+          <a:p xmlns:a="http://schemas.openxmlformats.org/drawingml/2006/main"/>
+        </p:txBody>
+      </p:sp>
+      <p:sp>
+        <p:nvSpPr>
+          <p:cNvPr id="100013" name="TextBox 2"/>
           <p:cNvSpPr txBox="1"/>
           <p:nvPr/>
         </p:nvSpPr>
@@ -1799,7 +1714,7 @@
       <p:grpSpPr/>
       <p:sp>
         <p:nvSpPr>
-          <p:cNvPr id="10014" name="TextBox 1"/>
+          <p:cNvPr id="100014" name="TextBox 1"/>
           <p:cNvSpPr/>
           <p:nvPr/>
         </p:nvSpPr>
@@ -1818,17 +1733,12 @@
         <p:txBody>
           <a:bodyPr xmlns:a="http://schemas.openxmlformats.org/drawingml/2006/main"/>
           <a:lstStyle xmlns:a="http://schemas.openxmlformats.org/drawingml/2006/main"/>
-          <a:p xmlns:a="http://schemas.openxmlformats.org/drawingml/2006/main">
-            <a:r>
-              <a:rPr lang="en-US"/>
-              <a:t/>
-            </a:r>
-          </a:p>
-        </p:txBody>
-      </p:sp>
-      <p:sp>
-        <p:nvSpPr>
-          <p:cNvPr id="10015" name="TextBox 2"/>
+          <a:p xmlns:a="http://schemas.openxmlformats.org/drawingml/2006/main"/>
+        </p:txBody>
+      </p:sp>
+      <p:sp>
+        <p:nvSpPr>
+          <p:cNvPr id="100015" name="TextBox 2"/>
           <p:cNvSpPr txBox="1"/>
           <p:nvPr/>
         </p:nvSpPr>
@@ -1886,7 +1796,7 @@
       <p:grpSpPr/>
       <p:sp>
         <p:nvSpPr>
-          <p:cNvPr id="10016" name="TextBox 1"/>
+          <p:cNvPr id="100016" name="TextBox 1"/>
           <p:cNvSpPr/>
           <p:nvPr/>
         </p:nvSpPr>
@@ -1905,17 +1815,12 @@
         <p:txBody>
           <a:bodyPr xmlns:a="http://schemas.openxmlformats.org/drawingml/2006/main"/>
           <a:lstStyle xmlns:a="http://schemas.openxmlformats.org/drawingml/2006/main"/>
-          <a:p xmlns:a="http://schemas.openxmlformats.org/drawingml/2006/main">
-            <a:r>
-              <a:rPr lang="en-US"/>
-              <a:t/>
-            </a:r>
-          </a:p>
-        </p:txBody>
-      </p:sp>
-      <p:sp>
-        <p:nvSpPr>
-          <p:cNvPr id="10017" name="TextBox 2"/>
+          <a:p xmlns:a="http://schemas.openxmlformats.org/drawingml/2006/main"/>
+        </p:txBody>
+      </p:sp>
+      <p:sp>
+        <p:nvSpPr>
+          <p:cNvPr id="100017" name="TextBox 2"/>
           <p:cNvSpPr txBox="1"/>
           <p:nvPr/>
         </p:nvSpPr>
